--- a/presentations/ROBOSANT_Restoran_UZ_kirill.pptx
+++ b/presentations/ROBOSANT_Restoran_UZ_kirill.pptx
@@ -3242,6 +3242,50 @@
         </p:nvSpPr>
         <p:spPr>
           <a:xfrm>
+            <a:off x="7818120" y="0"/>
+            <a:ext cx="4379976" cy="5989320"/>
+          </a:xfrm>
+          <a:prstGeom prst="rect">
+            <a:avLst/>
+          </a:prstGeom>
+          <a:solidFill>
+            <a:srgbClr val="E8F3FC"/>
+          </a:solidFill>
+          <a:ln>
+            <a:noFill/>
+          </a:ln>
+          <a:effectLst/>
+        </p:spPr>
+        <p:style>
+          <a:lnRef idx="1">
+            <a:schemeClr val="accent1"/>
+          </a:lnRef>
+          <a:fillRef idx="3">
+            <a:schemeClr val="accent1"/>
+          </a:fillRef>
+          <a:effectRef idx="2">
+            <a:schemeClr val="accent1"/>
+          </a:effectRef>
+          <a:fontRef idx="minor">
+            <a:schemeClr val="lt1"/>
+          </a:fontRef>
+        </p:style>
+        <p:txBody>
+          <a:bodyPr rtlCol="0" anchor="ctr"/>
+          <a:lstStyle/>
+          <a:p>
+            <a:pPr algn="ctr"/>
+          </a:p>
+        </p:txBody>
+      </p:sp>
+      <p:sp>
+        <p:nvSpPr>
+          <p:cNvPr id="6" name="Rectangle 5"/>
+          <p:cNvSpPr/>
+          <p:nvPr/>
+        </p:nvSpPr>
+        <p:spPr>
+          <a:xfrm>
             <a:off x="0" y="5989320"/>
             <a:ext cx="12191695" cy="868680"/>
           </a:xfrm>
@@ -3278,16 +3322,40 @@
           </a:p>
         </p:txBody>
       </p:sp>
-      <p:sp>
-        <p:nvSpPr>
-          <p:cNvPr id="6" name="TextBox 5"/>
+      <p:pic>
+        <p:nvPicPr>
+          <p:cNvPr id="7" name="Picture 6" descr="bella.png"/>
+          <p:cNvPicPr>
+            <a:picLocks noChangeAspect="1"/>
+          </p:cNvPicPr>
+          <p:nvPr/>
+        </p:nvPicPr>
+        <p:blipFill>
+          <a:blip r:embed="rId2"/>
+          <a:stretch>
+            <a:fillRect/>
+          </a:stretch>
+        </p:blipFill>
+        <p:spPr>
+          <a:xfrm>
+            <a:off x="8092440" y="320040"/>
+            <a:ext cx="4533900" cy="5440680"/>
+          </a:xfrm>
+          <a:prstGeom prst="rect">
+            <a:avLst/>
+          </a:prstGeom>
+        </p:spPr>
+      </p:pic>
+      <p:sp>
+        <p:nvSpPr>
+          <p:cNvPr id="8" name="TextBox 7"/>
           <p:cNvSpPr txBox="1"/>
           <p:nvPr/>
         </p:nvSpPr>
         <p:spPr>
           <a:xfrm>
             <a:off x="640080" y="411480"/>
-            <a:ext cx="10972800" cy="320040"/>
+            <a:ext cx="6949440" cy="320040"/>
           </a:xfrm>
           <a:prstGeom prst="rect">
             <a:avLst/>
@@ -3315,14 +3383,14 @@
       </p:sp>
       <p:sp>
         <p:nvSpPr>
-          <p:cNvPr id="7" name="TextBox 6"/>
-          <p:cNvSpPr txBox="1"/>
-          <p:nvPr/>
-        </p:nvSpPr>
-        <p:spPr>
-          <a:xfrm>
-            <a:off x="640080" y="914400"/>
-            <a:ext cx="10972800" cy="1005840"/>
+          <p:cNvPr id="9" name="TextBox 8"/>
+          <p:cNvSpPr txBox="1"/>
+          <p:nvPr/>
+        </p:nvSpPr>
+        <p:spPr>
+          <a:xfrm>
+            <a:off x="640080" y="868680"/>
+            <a:ext cx="6949440" cy="1051560"/>
           </a:xfrm>
           <a:prstGeom prst="rect">
             <a:avLst/>
@@ -3335,7 +3403,7 @@
           <a:p>
             <a:pPr algn="l"/>
             <a:r>
-              <a:rPr sz="5400" b="1">
+              <a:rPr sz="4800" b="1">
                 <a:solidFill>
                   <a:srgbClr val="0B3A6A"/>
                 </a:solidFill>
@@ -3350,14 +3418,14 @@
       </p:sp>
       <p:sp>
         <p:nvSpPr>
-          <p:cNvPr id="8" name="TextBox 7"/>
-          <p:cNvSpPr txBox="1"/>
-          <p:nvPr/>
-        </p:nvSpPr>
-        <p:spPr>
-          <a:xfrm>
-            <a:off x="640080" y="1965960"/>
-            <a:ext cx="10515600" cy="640080"/>
+          <p:cNvPr id="10" name="TextBox 9"/>
+          <p:cNvSpPr txBox="1"/>
+          <p:nvPr/>
+        </p:nvSpPr>
+        <p:spPr>
+          <a:xfrm>
+            <a:off x="640080" y="2011680"/>
+            <a:ext cx="6949440" cy="777240"/>
           </a:xfrm>
           <a:prstGeom prst="rect">
             <a:avLst/>
@@ -3370,7 +3438,7 @@
           <a:p>
             <a:pPr algn="l"/>
             <a:r>
-              <a:rPr sz="2000" b="0">
+              <a:rPr sz="1800" b="0">
                 <a:solidFill>
                   <a:srgbClr val="1C2E45"/>
                 </a:solidFill>
@@ -3385,14 +3453,14 @@
       </p:sp>
       <p:sp>
         <p:nvSpPr>
-          <p:cNvPr id="9" name="Rounded Rectangle 8"/>
+          <p:cNvPr id="11" name="Rounded Rectangle 10"/>
           <p:cNvSpPr/>
           <p:nvPr/>
         </p:nvSpPr>
         <p:spPr>
           <a:xfrm>
-            <a:off x="640080" y="2788920"/>
-            <a:ext cx="10789920" cy="640080"/>
+            <a:off x="640080" y="2880360"/>
+            <a:ext cx="6949440" cy="868680"/>
           </a:xfrm>
           <a:prstGeom prst="roundRect">
             <a:avLst>
@@ -3433,14 +3501,14 @@
       </p:sp>
       <p:sp>
         <p:nvSpPr>
-          <p:cNvPr id="10" name="TextBox 9"/>
-          <p:cNvSpPr txBox="1"/>
-          <p:nvPr/>
-        </p:nvSpPr>
-        <p:spPr>
-          <a:xfrm>
-            <a:off x="822960" y="2907792"/>
-            <a:ext cx="10424160" cy="457200"/>
+          <p:cNvPr id="12" name="TextBox 11"/>
+          <p:cNvSpPr txBox="1"/>
+          <p:nvPr/>
+        </p:nvSpPr>
+        <p:spPr>
+          <a:xfrm>
+            <a:off x="777240" y="2999232"/>
+            <a:ext cx="6675120" cy="685800"/>
           </a:xfrm>
           <a:prstGeom prst="rect">
             <a:avLst/>
@@ -3453,7 +3521,7 @@
           <a:p>
             <a:pPr algn="l"/>
             <a:r>
-              <a:rPr sz="1800" b="1">
+              <a:rPr sz="1600" b="1">
                 <a:solidFill>
                   <a:srgbClr val="0B3A6A"/>
                 </a:solidFill>
@@ -3468,14 +3536,14 @@
       </p:sp>
       <p:sp>
         <p:nvSpPr>
-          <p:cNvPr id="11" name="TextBox 10"/>
-          <p:cNvSpPr txBox="1"/>
-          <p:nvPr/>
-        </p:nvSpPr>
-        <p:spPr>
-          <a:xfrm>
-            <a:off x="640080" y="3657600"/>
-            <a:ext cx="10789920" cy="1188720"/>
+          <p:cNvPr id="13" name="TextBox 12"/>
+          <p:cNvSpPr txBox="1"/>
+          <p:nvPr/>
+        </p:nvSpPr>
+        <p:spPr>
+          <a:xfrm>
+            <a:off x="640080" y="3886200"/>
+            <a:ext cx="6949440" cy="1737360"/>
           </a:xfrm>
           <a:prstGeom prst="rect">
             <a:avLst/>
@@ -3488,7 +3556,7 @@
           <a:p>
             <a:pPr algn="l"/>
             <a:r>
-              <a:rPr sz="2000" b="0">
+              <a:rPr sz="1800" b="0">
                 <a:solidFill>
                   <a:srgbClr val="5A6E84"/>
                 </a:solidFill>
@@ -3503,7 +3571,7 @@
       </p:sp>
       <p:sp>
         <p:nvSpPr>
-          <p:cNvPr id="12" name="TextBox 11"/>
+          <p:cNvPr id="14" name="TextBox 13"/>
           <p:cNvSpPr txBox="1"/>
           <p:nvPr/>
         </p:nvSpPr>
@@ -7340,7 +7408,7 @@
         <p:spPr>
           <a:xfrm>
             <a:off x="411480" y="2560320"/>
-            <a:ext cx="11338560" cy="3749039"/>
+            <a:ext cx="8595360" cy="3749039"/>
           </a:xfrm>
           <a:prstGeom prst="roundRect">
             <a:avLst>
@@ -7387,8 +7455,8 @@
         </p:nvSpPr>
         <p:spPr>
           <a:xfrm>
-            <a:off x="731520" y="2788920"/>
-            <a:ext cx="10698480" cy="3291840"/>
+            <a:off x="640080" y="2743200"/>
+            <a:ext cx="8138160" cy="3383280"/>
           </a:xfrm>
           <a:prstGeom prst="rect">
             <a:avLst/>
@@ -7407,7 +7475,7 @@
               </a:spcAft>
             </a:pPr>
             <a:r>
-              <a:rPr sz="1700" b="0">
+              <a:rPr sz="1600" b="0">
                 <a:solidFill>
                   <a:srgbClr val="1C2E45"/>
                 </a:solidFill>
@@ -7425,7 +7493,7 @@
               </a:spcAft>
             </a:pPr>
             <a:r>
-              <a:rPr sz="1700" b="0">
+              <a:rPr sz="1600" b="0">
                 <a:solidFill>
                   <a:srgbClr val="1C2E45"/>
                 </a:solidFill>
@@ -7443,7 +7511,7 @@
               </a:spcAft>
             </a:pPr>
             <a:r>
-              <a:rPr sz="1700" b="0">
+              <a:rPr sz="1600" b="0">
                 <a:solidFill>
                   <a:srgbClr val="1C2E45"/>
                 </a:solidFill>
@@ -7461,7 +7529,7 @@
               </a:spcAft>
             </a:pPr>
             <a:r>
-              <a:rPr sz="1700" b="0">
+              <a:rPr sz="1600" b="0">
                 <a:solidFill>
                   <a:srgbClr val="1C2E45"/>
                 </a:solidFill>
@@ -7479,7 +7547,7 @@
               </a:spcAft>
             </a:pPr>
             <a:r>
-              <a:rPr sz="1700" b="0">
+              <a:rPr sz="1600" b="0">
                 <a:solidFill>
                   <a:srgbClr val="1C2E45"/>
                 </a:solidFill>
@@ -7497,7 +7565,7 @@
               </a:spcAft>
             </a:pPr>
             <a:r>
-              <a:rPr sz="1700" b="0">
+              <a:rPr sz="1600" b="0">
                 <a:solidFill>
                   <a:srgbClr val="1C2E45"/>
                 </a:solidFill>
@@ -7510,6 +7578,78 @@
           </a:p>
         </p:txBody>
       </p:sp>
+      <p:sp>
+        <p:nvSpPr>
+          <p:cNvPr id="23" name="Rounded Rectangle 22"/>
+          <p:cNvSpPr/>
+          <p:nvPr/>
+        </p:nvSpPr>
+        <p:spPr>
+          <a:xfrm>
+            <a:off x="9144000" y="2560320"/>
+            <a:ext cx="2606040" cy="3749039"/>
+          </a:xfrm>
+          <a:prstGeom prst="roundRect">
+            <a:avLst>
+              <a:gd name="adj" fmla="val 8000"/>
+            </a:avLst>
+          </a:prstGeom>
+          <a:solidFill>
+            <a:srgbClr val="E8F3FC"/>
+          </a:solidFill>
+          <a:ln w="15875">
+            <a:solidFill>
+              <a:srgbClr val="C5D8EC"/>
+            </a:solidFill>
+          </a:ln>
+          <a:effectLst/>
+        </p:spPr>
+        <p:style>
+          <a:lnRef idx="1">
+            <a:schemeClr val="accent1"/>
+          </a:lnRef>
+          <a:fillRef idx="3">
+            <a:schemeClr val="accent1"/>
+          </a:fillRef>
+          <a:effectRef idx="2">
+            <a:schemeClr val="accent1"/>
+          </a:effectRef>
+          <a:fontRef idx="minor">
+            <a:schemeClr val="lt1"/>
+          </a:fontRef>
+        </p:style>
+        <p:txBody>
+          <a:bodyPr rtlCol="0" anchor="ctr"/>
+          <a:lstStyle/>
+          <a:p>
+            <a:pPr algn="ctr"/>
+          </a:p>
+        </p:txBody>
+      </p:sp>
+      <p:pic>
+        <p:nvPicPr>
+          <p:cNvPr id="24" name="Picture 23" descr="bella.png"/>
+          <p:cNvPicPr>
+            <a:picLocks noChangeAspect="1"/>
+          </p:cNvPicPr>
+          <p:nvPr/>
+        </p:nvPicPr>
+        <p:blipFill>
+          <a:blip r:embed="rId2"/>
+          <a:stretch>
+            <a:fillRect/>
+          </a:stretch>
+        </p:blipFill>
+        <p:spPr>
+          <a:xfrm>
+            <a:off x="9281160" y="2697480"/>
+            <a:ext cx="2895600" cy="3474720"/>
+          </a:xfrm>
+          <a:prstGeom prst="rect">
+            <a:avLst/>
+          </a:prstGeom>
+        </p:spPr>
+      </p:pic>
     </p:spTree>
   </p:cSld>
   <p:clrMapOvr>
@@ -7668,8 +7808,8 @@
         </p:nvSpPr>
         <p:spPr>
           <a:xfrm>
-            <a:off x="640080" y="640080"/>
-            <a:ext cx="10972800" cy="1097280"/>
+            <a:off x="640080" y="502920"/>
+            <a:ext cx="7863840" cy="1097280"/>
           </a:xfrm>
           <a:prstGeom prst="rect">
             <a:avLst/>
@@ -7682,7 +7822,7 @@
           <a:p>
             <a:pPr algn="l"/>
             <a:r>
-              <a:rPr sz="2800" b="1">
+              <a:rPr sz="2600" b="1">
                 <a:solidFill>
                   <a:srgbClr val="0B3A6A"/>
                 </a:solidFill>
@@ -7703,8 +7843,8 @@
         </p:nvSpPr>
         <p:spPr>
           <a:xfrm>
-            <a:off x="640080" y="1828800"/>
-            <a:ext cx="10972800" cy="640080"/>
+            <a:off x="640080" y="1600200"/>
+            <a:ext cx="7863840" cy="640080"/>
           </a:xfrm>
           <a:prstGeom prst="rect">
             <a:avLst/>
@@ -7717,7 +7857,7 @@
           <a:p>
             <a:pPr algn="l"/>
             <a:r>
-              <a:rPr sz="1800" b="0">
+              <a:rPr sz="1600" b="0">
                 <a:solidFill>
                   <a:srgbClr val="5A6E84"/>
                 </a:solidFill>
@@ -7730,16 +7870,40 @@
           </a:p>
         </p:txBody>
       </p:sp>
-      <p:sp>
-        <p:nvSpPr>
-          <p:cNvPr id="7" name="Rounded Rectangle 6"/>
+      <p:pic>
+        <p:nvPicPr>
+          <p:cNvPr id="7" name="Picture 6" descr="bella.png"/>
+          <p:cNvPicPr>
+            <a:picLocks noChangeAspect="1"/>
+          </p:cNvPicPr>
+          <p:nvPr/>
+        </p:nvPicPr>
+        <p:blipFill>
+          <a:blip r:embed="rId2"/>
+          <a:stretch>
+            <a:fillRect/>
+          </a:stretch>
+        </p:blipFill>
+        <p:spPr>
+          <a:xfrm>
+            <a:off x="8686800" y="365760"/>
+            <a:ext cx="1943100" cy="2331720"/>
+          </a:xfrm>
+          <a:prstGeom prst="rect">
+            <a:avLst/>
+          </a:prstGeom>
+        </p:spPr>
+      </p:pic>
+      <p:sp>
+        <p:nvSpPr>
+          <p:cNvPr id="8" name="Rounded Rectangle 7"/>
           <p:cNvSpPr/>
           <p:nvPr/>
         </p:nvSpPr>
         <p:spPr>
           <a:xfrm>
-            <a:off x="640080" y="2743200"/>
-            <a:ext cx="2697480" cy="1234440"/>
+            <a:off x="640080" y="2468880"/>
+            <a:ext cx="2697480" cy="1097280"/>
           </a:xfrm>
           <a:prstGeom prst="roundRect">
             <a:avLst>
@@ -7780,13 +7944,13 @@
       </p:sp>
       <p:sp>
         <p:nvSpPr>
-          <p:cNvPr id="8" name="TextBox 7"/>
-          <p:cNvSpPr txBox="1"/>
-          <p:nvPr/>
-        </p:nvSpPr>
-        <p:spPr>
-          <a:xfrm>
-            <a:off x="731520" y="3108960"/>
+          <p:cNvPr id="9" name="TextBox 8"/>
+          <p:cNvSpPr txBox="1"/>
+          <p:nvPr/>
+        </p:nvSpPr>
+        <p:spPr>
+          <a:xfrm>
+            <a:off x="731520" y="2788920"/>
             <a:ext cx="2514600" cy="548640"/>
           </a:xfrm>
           <a:prstGeom prst="rect">
@@ -7815,14 +7979,14 @@
       </p:sp>
       <p:sp>
         <p:nvSpPr>
-          <p:cNvPr id="9" name="Rounded Rectangle 8"/>
+          <p:cNvPr id="10" name="Rounded Rectangle 9"/>
           <p:cNvSpPr/>
           <p:nvPr/>
         </p:nvSpPr>
         <p:spPr>
           <a:xfrm>
-            <a:off x="3474720" y="2743200"/>
-            <a:ext cx="2697480" cy="1234440"/>
+            <a:off x="3474720" y="2468880"/>
+            <a:ext cx="2697480" cy="1097280"/>
           </a:xfrm>
           <a:prstGeom prst="roundRect">
             <a:avLst>
@@ -7863,13 +8027,13 @@
       </p:sp>
       <p:sp>
         <p:nvSpPr>
-          <p:cNvPr id="10" name="TextBox 9"/>
-          <p:cNvSpPr txBox="1"/>
-          <p:nvPr/>
-        </p:nvSpPr>
-        <p:spPr>
-          <a:xfrm>
-            <a:off x="3566160" y="3108960"/>
+          <p:cNvPr id="11" name="TextBox 10"/>
+          <p:cNvSpPr txBox="1"/>
+          <p:nvPr/>
+        </p:nvSpPr>
+        <p:spPr>
+          <a:xfrm>
+            <a:off x="3566160" y="2788920"/>
             <a:ext cx="2514600" cy="548640"/>
           </a:xfrm>
           <a:prstGeom prst="rect">
@@ -7898,14 +8062,14 @@
       </p:sp>
       <p:sp>
         <p:nvSpPr>
-          <p:cNvPr id="11" name="Rounded Rectangle 10"/>
+          <p:cNvPr id="12" name="Rounded Rectangle 11"/>
           <p:cNvSpPr/>
           <p:nvPr/>
         </p:nvSpPr>
         <p:spPr>
           <a:xfrm>
-            <a:off x="6309360" y="2743200"/>
-            <a:ext cx="2697480" cy="1234440"/>
+            <a:off x="6309360" y="2468880"/>
+            <a:ext cx="2697480" cy="1097280"/>
           </a:xfrm>
           <a:prstGeom prst="roundRect">
             <a:avLst>
@@ -7946,13 +8110,13 @@
       </p:sp>
       <p:sp>
         <p:nvSpPr>
-          <p:cNvPr id="12" name="TextBox 11"/>
-          <p:cNvSpPr txBox="1"/>
-          <p:nvPr/>
-        </p:nvSpPr>
-        <p:spPr>
-          <a:xfrm>
-            <a:off x="6400800" y="3108960"/>
+          <p:cNvPr id="13" name="TextBox 12"/>
+          <p:cNvSpPr txBox="1"/>
+          <p:nvPr/>
+        </p:nvSpPr>
+        <p:spPr>
+          <a:xfrm>
+            <a:off x="6400800" y="2788920"/>
             <a:ext cx="2514600" cy="548640"/>
           </a:xfrm>
           <a:prstGeom prst="rect">
@@ -7981,14 +8145,14 @@
       </p:sp>
       <p:sp>
         <p:nvSpPr>
-          <p:cNvPr id="13" name="Rounded Rectangle 12"/>
+          <p:cNvPr id="14" name="Rounded Rectangle 13"/>
           <p:cNvSpPr/>
           <p:nvPr/>
         </p:nvSpPr>
         <p:spPr>
           <a:xfrm>
-            <a:off x="9144000" y="2743200"/>
-            <a:ext cx="2697480" cy="1234440"/>
+            <a:off x="9144000" y="2468880"/>
+            <a:ext cx="2697480" cy="1097280"/>
           </a:xfrm>
           <a:prstGeom prst="roundRect">
             <a:avLst>
@@ -8029,13 +8193,13 @@
       </p:sp>
       <p:sp>
         <p:nvSpPr>
-          <p:cNvPr id="14" name="TextBox 13"/>
-          <p:cNvSpPr txBox="1"/>
-          <p:nvPr/>
-        </p:nvSpPr>
-        <p:spPr>
-          <a:xfrm>
-            <a:off x="9235440" y="3108960"/>
+          <p:cNvPr id="15" name="TextBox 14"/>
+          <p:cNvSpPr txBox="1"/>
+          <p:nvPr/>
+        </p:nvSpPr>
+        <p:spPr>
+          <a:xfrm>
+            <a:off x="9235440" y="2788920"/>
             <a:ext cx="2514600" cy="548640"/>
           </a:xfrm>
           <a:prstGeom prst="rect">
@@ -8064,13 +8228,13 @@
       </p:sp>
       <p:sp>
         <p:nvSpPr>
-          <p:cNvPr id="15" name="Rounded Rectangle 14"/>
+          <p:cNvPr id="16" name="Rounded Rectangle 15"/>
           <p:cNvSpPr/>
           <p:nvPr/>
         </p:nvSpPr>
         <p:spPr>
           <a:xfrm>
-            <a:off x="640080" y="4297680"/>
+            <a:off x="640080" y="3840480"/>
             <a:ext cx="10972800" cy="1051560"/>
           </a:xfrm>
           <a:prstGeom prst="roundRect">
@@ -8110,13 +8274,13 @@
       </p:sp>
       <p:sp>
         <p:nvSpPr>
-          <p:cNvPr id="16" name="TextBox 15"/>
-          <p:cNvSpPr txBox="1"/>
-          <p:nvPr/>
-        </p:nvSpPr>
-        <p:spPr>
-          <a:xfrm>
-            <a:off x="640080" y="4572000"/>
+          <p:cNvPr id="17" name="TextBox 16"/>
+          <p:cNvSpPr txBox="1"/>
+          <p:nvPr/>
+        </p:nvSpPr>
+        <p:spPr>
+          <a:xfrm>
+            <a:off x="640080" y="4114800"/>
             <a:ext cx="10972800" cy="548640"/>
           </a:xfrm>
           <a:prstGeom prst="rect">
@@ -8145,14 +8309,14 @@
       </p:sp>
       <p:sp>
         <p:nvSpPr>
-          <p:cNvPr id="17" name="TextBox 16"/>
-          <p:cNvSpPr txBox="1"/>
-          <p:nvPr/>
-        </p:nvSpPr>
-        <p:spPr>
-          <a:xfrm>
-            <a:off x="640080" y="5760720"/>
-            <a:ext cx="10972800" cy="457200"/>
+          <p:cNvPr id="18" name="TextBox 17"/>
+          <p:cNvSpPr txBox="1"/>
+          <p:nvPr/>
+        </p:nvSpPr>
+        <p:spPr>
+          <a:xfrm>
+            <a:off x="640080" y="5120640"/>
+            <a:ext cx="10972800" cy="822960"/>
           </a:xfrm>
           <a:prstGeom prst="rect">
             <a:avLst/>
@@ -10121,8 +10285,8 @@
         </p:nvSpPr>
         <p:spPr>
           <a:xfrm>
-            <a:off x="365760" y="1371600"/>
-            <a:ext cx="2174991" cy="4937760"/>
+            <a:off x="365760" y="1325880"/>
+            <a:ext cx="2174991" cy="5029200"/>
           </a:xfrm>
           <a:prstGeom prst="roundRect">
             <a:avLst>
@@ -10169,8 +10333,8 @@
         </p:nvSpPr>
         <p:spPr>
           <a:xfrm>
-            <a:off x="365760" y="1371600"/>
-            <a:ext cx="2174991" cy="109728"/>
+            <a:off x="365760" y="1325880"/>
+            <a:ext cx="2174991" cy="91440"/>
           </a:xfrm>
           <a:prstGeom prst="rect">
             <a:avLst/>
@@ -10213,8 +10377,8 @@
         </p:nvSpPr>
         <p:spPr>
           <a:xfrm>
-            <a:off x="475488" y="1645920"/>
-            <a:ext cx="1955535" cy="1005840"/>
+            <a:off x="438912" y="1463040"/>
+            <a:ext cx="2028687" cy="640080"/>
           </a:xfrm>
           <a:prstGeom prst="rect">
             <a:avLst/>
@@ -10227,7 +10391,7 @@
           <a:p>
             <a:pPr algn="ctr"/>
             <a:r>
-              <a:rPr sz="1500" b="1">
+              <a:rPr sz="1300" b="1">
                 <a:solidFill>
                   <a:srgbClr val="0B3A6A"/>
                 </a:solidFill>
@@ -10240,16 +10404,40 @@
           </a:p>
         </p:txBody>
       </p:sp>
-      <p:sp>
-        <p:nvSpPr>
-          <p:cNvPr id="13" name="TextBox 12"/>
-          <p:cNvSpPr txBox="1"/>
-          <p:nvPr/>
-        </p:nvSpPr>
-        <p:spPr>
-          <a:xfrm>
-            <a:off x="475488" y="2743200"/>
-            <a:ext cx="1955535" cy="3200400"/>
+      <p:pic>
+        <p:nvPicPr>
+          <p:cNvPr id="13" name="Picture 12" descr="bella.png"/>
+          <p:cNvPicPr>
+            <a:picLocks noChangeAspect="1"/>
+          </p:cNvPicPr>
+          <p:nvPr/>
+        </p:nvPicPr>
+        <p:blipFill>
+          <a:blip r:embed="rId2"/>
+          <a:stretch>
+            <a:fillRect/>
+          </a:stretch>
+        </p:blipFill>
+        <p:spPr>
+          <a:xfrm>
+            <a:off x="566928" y="2057400"/>
+            <a:ext cx="1790700" cy="2148840"/>
+          </a:xfrm>
+          <a:prstGeom prst="rect">
+            <a:avLst/>
+          </a:prstGeom>
+        </p:spPr>
+      </p:pic>
+      <p:sp>
+        <p:nvSpPr>
+          <p:cNvPr id="14" name="TextBox 13"/>
+          <p:cNvSpPr txBox="1"/>
+          <p:nvPr/>
+        </p:nvSpPr>
+        <p:spPr>
+          <a:xfrm>
+            <a:off x="457200" y="4251960"/>
+            <a:ext cx="1992111" cy="1920240"/>
           </a:xfrm>
           <a:prstGeom prst="rect">
             <a:avLst/>
@@ -10264,7 +10452,7 @@
           <a:p>
             <a:pPr algn="ctr"/>
             <a:r>
-              <a:rPr sz="1300" b="0">
+              <a:rPr sz="1200" b="0">
                 <a:solidFill>
                   <a:srgbClr val="1C2E45"/>
                 </a:solidFill>
@@ -10281,14 +10469,14 @@
       </p:sp>
       <p:sp>
         <p:nvSpPr>
-          <p:cNvPr id="14" name="Rounded Rectangle 13"/>
+          <p:cNvPr id="15" name="Rounded Rectangle 14"/>
           <p:cNvSpPr/>
           <p:nvPr/>
         </p:nvSpPr>
         <p:spPr>
           <a:xfrm>
-            <a:off x="2687055" y="1371600"/>
-            <a:ext cx="2174991" cy="4937760"/>
+            <a:off x="2687055" y="1325880"/>
+            <a:ext cx="2174991" cy="5029200"/>
           </a:xfrm>
           <a:prstGeom prst="roundRect">
             <a:avLst>
@@ -10329,14 +10517,14 @@
       </p:sp>
       <p:sp>
         <p:nvSpPr>
-          <p:cNvPr id="15" name="Rectangle 14"/>
+          <p:cNvPr id="16" name="Rectangle 15"/>
           <p:cNvSpPr/>
           <p:nvPr/>
         </p:nvSpPr>
         <p:spPr>
           <a:xfrm>
-            <a:off x="2687055" y="1371600"/>
-            <a:ext cx="2174991" cy="109728"/>
+            <a:off x="2687055" y="1325880"/>
+            <a:ext cx="2174991" cy="91440"/>
           </a:xfrm>
           <a:prstGeom prst="rect">
             <a:avLst/>
@@ -10373,14 +10561,14 @@
       </p:sp>
       <p:sp>
         <p:nvSpPr>
-          <p:cNvPr id="16" name="TextBox 15"/>
-          <p:cNvSpPr txBox="1"/>
-          <p:nvPr/>
-        </p:nvSpPr>
-        <p:spPr>
-          <a:xfrm>
-            <a:off x="2796783" y="1645920"/>
-            <a:ext cx="1955535" cy="1005840"/>
+          <p:cNvPr id="17" name="TextBox 16"/>
+          <p:cNvSpPr txBox="1"/>
+          <p:nvPr/>
+        </p:nvSpPr>
+        <p:spPr>
+          <a:xfrm>
+            <a:off x="2760207" y="1463040"/>
+            <a:ext cx="2028687" cy="640080"/>
           </a:xfrm>
           <a:prstGeom prst="rect">
             <a:avLst/>
@@ -10393,7 +10581,7 @@
           <a:p>
             <a:pPr algn="ctr"/>
             <a:r>
-              <a:rPr sz="1500" b="1">
+              <a:rPr sz="1300" b="1">
                 <a:solidFill>
                   <a:srgbClr val="0B3A6A"/>
                 </a:solidFill>
@@ -10406,16 +10594,40 @@
           </a:p>
         </p:txBody>
       </p:sp>
-      <p:sp>
-        <p:nvSpPr>
-          <p:cNvPr id="17" name="TextBox 16"/>
-          <p:cNvSpPr txBox="1"/>
-          <p:nvPr/>
-        </p:nvSpPr>
-        <p:spPr>
-          <a:xfrm>
-            <a:off x="2796783" y="2743200"/>
-            <a:ext cx="1955535" cy="3200400"/>
+      <p:pic>
+        <p:nvPicPr>
+          <p:cNvPr id="18" name="Picture 17" descr="pudu2.png"/>
+          <p:cNvPicPr>
+            <a:picLocks noChangeAspect="1"/>
+          </p:cNvPicPr>
+          <p:nvPr/>
+        </p:nvPicPr>
+        <p:blipFill>
+          <a:blip r:embed="rId3"/>
+          <a:stretch>
+            <a:fillRect/>
+          </a:stretch>
+        </p:blipFill>
+        <p:spPr>
+          <a:xfrm>
+            <a:off x="2888223" y="2057400"/>
+            <a:ext cx="1651260" cy="2148840"/>
+          </a:xfrm>
+          <a:prstGeom prst="rect">
+            <a:avLst/>
+          </a:prstGeom>
+        </p:spPr>
+      </p:pic>
+      <p:sp>
+        <p:nvSpPr>
+          <p:cNvPr id="19" name="TextBox 18"/>
+          <p:cNvSpPr txBox="1"/>
+          <p:nvPr/>
+        </p:nvSpPr>
+        <p:spPr>
+          <a:xfrm>
+            <a:off x="2778495" y="4251960"/>
+            <a:ext cx="1992111" cy="1920240"/>
           </a:xfrm>
           <a:prstGeom prst="rect">
             <a:avLst/>
@@ -10430,7 +10642,7 @@
           <a:p>
             <a:pPr algn="ctr"/>
             <a:r>
-              <a:rPr sz="1300" b="0">
+              <a:rPr sz="1200" b="0">
                 <a:solidFill>
                   <a:srgbClr val="1C2E45"/>
                 </a:solidFill>
@@ -10447,14 +10659,14 @@
       </p:sp>
       <p:sp>
         <p:nvSpPr>
-          <p:cNvPr id="18" name="Rounded Rectangle 17"/>
+          <p:cNvPr id="20" name="Rounded Rectangle 19"/>
           <p:cNvSpPr/>
           <p:nvPr/>
         </p:nvSpPr>
         <p:spPr>
           <a:xfrm>
-            <a:off x="5008351" y="1371600"/>
-            <a:ext cx="2174991" cy="4937760"/>
+            <a:off x="5008351" y="1325880"/>
+            <a:ext cx="2174991" cy="5029200"/>
           </a:xfrm>
           <a:prstGeom prst="roundRect">
             <a:avLst>
@@ -10495,14 +10707,14 @@
       </p:sp>
       <p:sp>
         <p:nvSpPr>
-          <p:cNvPr id="19" name="Rectangle 18"/>
+          <p:cNvPr id="21" name="Rectangle 20"/>
           <p:cNvSpPr/>
           <p:nvPr/>
         </p:nvSpPr>
         <p:spPr>
           <a:xfrm>
-            <a:off x="5008351" y="1371600"/>
-            <a:ext cx="2174991" cy="109728"/>
+            <a:off x="5008351" y="1325880"/>
+            <a:ext cx="2174991" cy="91440"/>
           </a:xfrm>
           <a:prstGeom prst="rect">
             <a:avLst/>
@@ -10539,14 +10751,14 @@
       </p:sp>
       <p:sp>
         <p:nvSpPr>
-          <p:cNvPr id="20" name="TextBox 19"/>
-          <p:cNvSpPr txBox="1"/>
-          <p:nvPr/>
-        </p:nvSpPr>
-        <p:spPr>
-          <a:xfrm>
-            <a:off x="5118079" y="1645920"/>
-            <a:ext cx="1955535" cy="1005840"/>
+          <p:cNvPr id="22" name="TextBox 21"/>
+          <p:cNvSpPr txBox="1"/>
+          <p:nvPr/>
+        </p:nvSpPr>
+        <p:spPr>
+          <a:xfrm>
+            <a:off x="5081503" y="1463040"/>
+            <a:ext cx="2028687" cy="640080"/>
           </a:xfrm>
           <a:prstGeom prst="rect">
             <a:avLst/>
@@ -10559,7 +10771,7 @@
           <a:p>
             <a:pPr algn="ctr"/>
             <a:r>
-              <a:rPr sz="1500" b="1">
+              <a:rPr sz="1300" b="1">
                 <a:solidFill>
                   <a:srgbClr val="0B3A6A"/>
                 </a:solidFill>
@@ -10572,16 +10784,40 @@
           </a:p>
         </p:txBody>
       </p:sp>
-      <p:sp>
-        <p:nvSpPr>
-          <p:cNvPr id="21" name="TextBox 20"/>
-          <p:cNvSpPr txBox="1"/>
-          <p:nvPr/>
-        </p:nvSpPr>
-        <p:spPr>
-          <a:xfrm>
-            <a:off x="5118079" y="2743200"/>
-            <a:ext cx="1955535" cy="3200400"/>
+      <p:pic>
+        <p:nvPicPr>
+          <p:cNvPr id="23" name="Picture 22" descr="ketty.png"/>
+          <p:cNvPicPr>
+            <a:picLocks noChangeAspect="1"/>
+          </p:cNvPicPr>
+          <p:nvPr/>
+        </p:nvPicPr>
+        <p:blipFill>
+          <a:blip r:embed="rId4"/>
+          <a:stretch>
+            <a:fillRect/>
+          </a:stretch>
+        </p:blipFill>
+        <p:spPr>
+          <a:xfrm>
+            <a:off x="5209519" y="2057400"/>
+            <a:ext cx="1637558" cy="2148840"/>
+          </a:xfrm>
+          <a:prstGeom prst="rect">
+            <a:avLst/>
+          </a:prstGeom>
+        </p:spPr>
+      </p:pic>
+      <p:sp>
+        <p:nvSpPr>
+          <p:cNvPr id="24" name="TextBox 23"/>
+          <p:cNvSpPr txBox="1"/>
+          <p:nvPr/>
+        </p:nvSpPr>
+        <p:spPr>
+          <a:xfrm>
+            <a:off x="5099791" y="4251960"/>
+            <a:ext cx="1992111" cy="1920240"/>
           </a:xfrm>
           <a:prstGeom prst="rect">
             <a:avLst/>
@@ -10596,7 +10832,7 @@
           <a:p>
             <a:pPr algn="ctr"/>
             <a:r>
-              <a:rPr sz="1300" b="0">
+              <a:rPr sz="1200" b="0">
                 <a:solidFill>
                   <a:srgbClr val="1C2E45"/>
                 </a:solidFill>
@@ -10613,14 +10849,14 @@
       </p:sp>
       <p:sp>
         <p:nvSpPr>
-          <p:cNvPr id="22" name="Rounded Rectangle 21"/>
+          <p:cNvPr id="25" name="Rounded Rectangle 24"/>
           <p:cNvSpPr/>
           <p:nvPr/>
         </p:nvSpPr>
         <p:spPr>
           <a:xfrm>
-            <a:off x="7329647" y="1371600"/>
-            <a:ext cx="2174991" cy="4937760"/>
+            <a:off x="7329647" y="1325880"/>
+            <a:ext cx="2174991" cy="5029200"/>
           </a:xfrm>
           <a:prstGeom prst="roundRect">
             <a:avLst>
@@ -10661,14 +10897,14 @@
       </p:sp>
       <p:sp>
         <p:nvSpPr>
-          <p:cNvPr id="23" name="Rectangle 22"/>
+          <p:cNvPr id="26" name="Rectangle 25"/>
           <p:cNvSpPr/>
           <p:nvPr/>
         </p:nvSpPr>
         <p:spPr>
           <a:xfrm>
-            <a:off x="7329647" y="1371600"/>
-            <a:ext cx="2174991" cy="109728"/>
+            <a:off x="7329647" y="1325880"/>
+            <a:ext cx="2174991" cy="91440"/>
           </a:xfrm>
           <a:prstGeom prst="rect">
             <a:avLst/>
@@ -10705,14 +10941,14 @@
       </p:sp>
       <p:sp>
         <p:nvSpPr>
-          <p:cNvPr id="24" name="TextBox 23"/>
-          <p:cNvSpPr txBox="1"/>
-          <p:nvPr/>
-        </p:nvSpPr>
-        <p:spPr>
-          <a:xfrm>
-            <a:off x="7439375" y="1645920"/>
-            <a:ext cx="1955535" cy="1005840"/>
+          <p:cNvPr id="27" name="TextBox 26"/>
+          <p:cNvSpPr txBox="1"/>
+          <p:nvPr/>
+        </p:nvSpPr>
+        <p:spPr>
+          <a:xfrm>
+            <a:off x="7402799" y="1463040"/>
+            <a:ext cx="2028687" cy="640080"/>
           </a:xfrm>
           <a:prstGeom prst="rect">
             <a:avLst/>
@@ -10725,7 +10961,7 @@
           <a:p>
             <a:pPr algn="ctr"/>
             <a:r>
-              <a:rPr sz="1500" b="1">
+              <a:rPr sz="1300" b="1">
                 <a:solidFill>
                   <a:srgbClr val="0B3A6A"/>
                 </a:solidFill>
@@ -10738,16 +10974,40 @@
           </a:p>
         </p:txBody>
       </p:sp>
-      <p:sp>
-        <p:nvSpPr>
-          <p:cNvPr id="25" name="TextBox 24"/>
-          <p:cNvSpPr txBox="1"/>
-          <p:nvPr/>
-        </p:nvSpPr>
-        <p:spPr>
-          <a:xfrm>
-            <a:off x="7439375" y="2743200"/>
-            <a:ext cx="1955535" cy="3200400"/>
+      <p:pic>
+        <p:nvPicPr>
+          <p:cNvPr id="28" name="Picture 27" descr="hola.png"/>
+          <p:cNvPicPr>
+            <a:picLocks noChangeAspect="1"/>
+          </p:cNvPicPr>
+          <p:nvPr/>
+        </p:nvPicPr>
+        <p:blipFill>
+          <a:blip r:embed="rId5"/>
+          <a:stretch>
+            <a:fillRect/>
+          </a:stretch>
+        </p:blipFill>
+        <p:spPr>
+          <a:xfrm>
+            <a:off x="7530815" y="2057400"/>
+            <a:ext cx="1389711" cy="2148840"/>
+          </a:xfrm>
+          <a:prstGeom prst="rect">
+            <a:avLst/>
+          </a:prstGeom>
+        </p:spPr>
+      </p:pic>
+      <p:sp>
+        <p:nvSpPr>
+          <p:cNvPr id="29" name="TextBox 28"/>
+          <p:cNvSpPr txBox="1"/>
+          <p:nvPr/>
+        </p:nvSpPr>
+        <p:spPr>
+          <a:xfrm>
+            <a:off x="7421087" y="4251960"/>
+            <a:ext cx="1992111" cy="1920240"/>
           </a:xfrm>
           <a:prstGeom prst="rect">
             <a:avLst/>
@@ -10762,7 +11022,7 @@
           <a:p>
             <a:pPr algn="ctr"/>
             <a:r>
-              <a:rPr sz="1300" b="0">
+              <a:rPr sz="1200" b="0">
                 <a:solidFill>
                   <a:srgbClr val="1C2E45"/>
                 </a:solidFill>
@@ -10779,14 +11039,14 @@
       </p:sp>
       <p:sp>
         <p:nvSpPr>
-          <p:cNvPr id="26" name="Rounded Rectangle 25"/>
+          <p:cNvPr id="30" name="Rounded Rectangle 29"/>
           <p:cNvSpPr/>
           <p:nvPr/>
         </p:nvSpPr>
         <p:spPr>
           <a:xfrm>
-            <a:off x="9650943" y="1371600"/>
-            <a:ext cx="2174991" cy="4937760"/>
+            <a:off x="9650943" y="1325880"/>
+            <a:ext cx="2174991" cy="5029200"/>
           </a:xfrm>
           <a:prstGeom prst="roundRect">
             <a:avLst>
@@ -10827,14 +11087,14 @@
       </p:sp>
       <p:sp>
         <p:nvSpPr>
-          <p:cNvPr id="27" name="Rectangle 26"/>
+          <p:cNvPr id="31" name="Rectangle 30"/>
           <p:cNvSpPr/>
           <p:nvPr/>
         </p:nvSpPr>
         <p:spPr>
           <a:xfrm>
-            <a:off x="9650943" y="1371600"/>
-            <a:ext cx="2174991" cy="109728"/>
+            <a:off x="9650943" y="1325880"/>
+            <a:ext cx="2174991" cy="91440"/>
           </a:xfrm>
           <a:prstGeom prst="rect">
             <a:avLst/>
@@ -10871,14 +11131,14 @@
       </p:sp>
       <p:sp>
         <p:nvSpPr>
-          <p:cNvPr id="28" name="TextBox 27"/>
-          <p:cNvSpPr txBox="1"/>
-          <p:nvPr/>
-        </p:nvSpPr>
-        <p:spPr>
-          <a:xfrm>
-            <a:off x="9760671" y="1645920"/>
-            <a:ext cx="1955535" cy="1005840"/>
+          <p:cNvPr id="32" name="TextBox 31"/>
+          <p:cNvSpPr txBox="1"/>
+          <p:nvPr/>
+        </p:nvSpPr>
+        <p:spPr>
+          <a:xfrm>
+            <a:off x="9724095" y="1463040"/>
+            <a:ext cx="2028687" cy="640080"/>
           </a:xfrm>
           <a:prstGeom prst="rect">
             <a:avLst/>
@@ -10891,7 +11151,7 @@
           <a:p>
             <a:pPr algn="ctr"/>
             <a:r>
-              <a:rPr sz="1500" b="1">
+              <a:rPr sz="1300" b="1">
                 <a:solidFill>
                   <a:srgbClr val="0B3A6A"/>
                 </a:solidFill>
@@ -10904,16 +11164,40 @@
           </a:p>
         </p:txBody>
       </p:sp>
-      <p:sp>
-        <p:nvSpPr>
-          <p:cNvPr id="29" name="TextBox 28"/>
-          <p:cNvSpPr txBox="1"/>
-          <p:nvPr/>
-        </p:nvSpPr>
-        <p:spPr>
-          <a:xfrm>
-            <a:off x="9760671" y="2743200"/>
-            <a:ext cx="1955535" cy="3200400"/>
+      <p:pic>
+        <p:nvPicPr>
+          <p:cNvPr id="33" name="Picture 32" descr="cc1.png"/>
+          <p:cNvPicPr>
+            <a:picLocks noChangeAspect="1"/>
+          </p:cNvPicPr>
+          <p:nvPr/>
+        </p:nvPicPr>
+        <p:blipFill>
+          <a:blip r:embed="rId6"/>
+          <a:stretch>
+            <a:fillRect/>
+          </a:stretch>
+        </p:blipFill>
+        <p:spPr>
+          <a:xfrm>
+            <a:off x="9852111" y="2057400"/>
+            <a:ext cx="1208118" cy="2148840"/>
+          </a:xfrm>
+          <a:prstGeom prst="rect">
+            <a:avLst/>
+          </a:prstGeom>
+        </p:spPr>
+      </p:pic>
+      <p:sp>
+        <p:nvSpPr>
+          <p:cNvPr id="34" name="TextBox 33"/>
+          <p:cNvSpPr txBox="1"/>
+          <p:nvPr/>
+        </p:nvSpPr>
+        <p:spPr>
+          <a:xfrm>
+            <a:off x="9742383" y="4251960"/>
+            <a:ext cx="1992111" cy="1920240"/>
           </a:xfrm>
           <a:prstGeom prst="rect">
             <a:avLst/>
@@ -10928,7 +11212,7 @@
           <a:p>
             <a:pPr algn="ctr"/>
             <a:r>
-              <a:rPr sz="1300" b="0">
+              <a:rPr sz="1200" b="0">
                 <a:solidFill>
                   <a:srgbClr val="1C2E45"/>
                 </a:solidFill>
@@ -11276,8 +11560,80 @@
         </p:nvSpPr>
         <p:spPr>
           <a:xfrm>
-            <a:off x="365760" y="1280160"/>
-            <a:ext cx="6675120" cy="5074920"/>
+            <a:off x="320040" y="1234440"/>
+            <a:ext cx="3246120" cy="5120640"/>
+          </a:xfrm>
+          <a:prstGeom prst="roundRect">
+            <a:avLst>
+              <a:gd name="adj" fmla="val 8000"/>
+            </a:avLst>
+          </a:prstGeom>
+          <a:solidFill>
+            <a:srgbClr val="E8F3FC"/>
+          </a:solidFill>
+          <a:ln w="15875">
+            <a:solidFill>
+              <a:srgbClr val="C5D8EC"/>
+            </a:solidFill>
+          </a:ln>
+          <a:effectLst/>
+        </p:spPr>
+        <p:style>
+          <a:lnRef idx="1">
+            <a:schemeClr val="accent1"/>
+          </a:lnRef>
+          <a:fillRef idx="3">
+            <a:schemeClr val="accent1"/>
+          </a:fillRef>
+          <a:effectRef idx="2">
+            <a:schemeClr val="accent1"/>
+          </a:effectRef>
+          <a:fontRef idx="minor">
+            <a:schemeClr val="lt1"/>
+          </a:fontRef>
+        </p:style>
+        <p:txBody>
+          <a:bodyPr rtlCol="0" anchor="ctr"/>
+          <a:lstStyle/>
+          <a:p>
+            <a:pPr algn="ctr"/>
+          </a:p>
+        </p:txBody>
+      </p:sp>
+      <p:pic>
+        <p:nvPicPr>
+          <p:cNvPr id="11" name="Picture 10" descr="bella.png"/>
+          <p:cNvPicPr>
+            <a:picLocks noChangeAspect="1"/>
+          </p:cNvPicPr>
+          <p:nvPr/>
+        </p:nvPicPr>
+        <p:blipFill>
+          <a:blip r:embed="rId2"/>
+          <a:stretch>
+            <a:fillRect/>
+          </a:stretch>
+        </p:blipFill>
+        <p:spPr>
+          <a:xfrm>
+            <a:off x="502920" y="1371600"/>
+            <a:ext cx="4038600" cy="4846320"/>
+          </a:xfrm>
+          <a:prstGeom prst="rect">
+            <a:avLst/>
+          </a:prstGeom>
+        </p:spPr>
+      </p:pic>
+      <p:sp>
+        <p:nvSpPr>
+          <p:cNvPr id="12" name="Rounded Rectangle 11"/>
+          <p:cNvSpPr/>
+          <p:nvPr/>
+        </p:nvSpPr>
+        <p:spPr>
+          <a:xfrm>
+            <a:off x="3703320" y="1234440"/>
+            <a:ext cx="4434840" cy="5120640"/>
           </a:xfrm>
           <a:prstGeom prst="roundRect">
             <a:avLst>
@@ -11318,14 +11674,14 @@
       </p:sp>
       <p:sp>
         <p:nvSpPr>
-          <p:cNvPr id="11" name="TextBox 10"/>
-          <p:cNvSpPr txBox="1"/>
-          <p:nvPr/>
-        </p:nvSpPr>
-        <p:spPr>
-          <a:xfrm>
-            <a:off x="594360" y="1463040"/>
-            <a:ext cx="6309360" cy="4754880"/>
+          <p:cNvPr id="13" name="TextBox 12"/>
+          <p:cNvSpPr txBox="1"/>
+          <p:nvPr/>
+        </p:nvSpPr>
+        <p:spPr>
+          <a:xfrm>
+            <a:off x="3840480" y="1371600"/>
+            <a:ext cx="4160520" cy="4846320"/>
           </a:xfrm>
           <a:prstGeom prst="rect">
             <a:avLst/>
@@ -11344,7 +11700,7 @@
               </a:spcAft>
             </a:pPr>
             <a:r>
-              <a:rPr sz="1600" b="0">
+              <a:rPr sz="1300" b="0">
                 <a:solidFill>
                   <a:srgbClr val="1C2E45"/>
                 </a:solidFill>
@@ -11362,7 +11718,7 @@
               </a:spcAft>
             </a:pPr>
             <a:r>
-              <a:rPr sz="1600" b="0">
+              <a:rPr sz="1300" b="0">
                 <a:solidFill>
                   <a:srgbClr val="1C2E45"/>
                 </a:solidFill>
@@ -11380,7 +11736,7 @@
               </a:spcAft>
             </a:pPr>
             <a:r>
-              <a:rPr sz="1600" b="0">
+              <a:rPr sz="1300" b="0">
                 <a:solidFill>
                   <a:srgbClr val="1C2E45"/>
                 </a:solidFill>
@@ -11398,7 +11754,7 @@
               </a:spcAft>
             </a:pPr>
             <a:r>
-              <a:rPr sz="1600" b="0">
+              <a:rPr sz="1300" b="0">
                 <a:solidFill>
                   <a:srgbClr val="1C2E45"/>
                 </a:solidFill>
@@ -11416,7 +11772,7 @@
               </a:spcAft>
             </a:pPr>
             <a:r>
-              <a:rPr sz="1600" b="0">
+              <a:rPr sz="1300" b="0">
                 <a:solidFill>
                   <a:srgbClr val="1C2E45"/>
                 </a:solidFill>
@@ -11434,7 +11790,7 @@
               </a:spcAft>
             </a:pPr>
             <a:r>
-              <a:rPr sz="1600" b="0">
+              <a:rPr sz="1300" b="0">
                 <a:solidFill>
                   <a:srgbClr val="1C2E45"/>
                 </a:solidFill>
@@ -11452,7 +11808,7 @@
               </a:spcAft>
             </a:pPr>
             <a:r>
-              <a:rPr sz="1600" b="0">
+              <a:rPr sz="1300" b="0">
                 <a:solidFill>
                   <a:srgbClr val="1C2E45"/>
                 </a:solidFill>
@@ -11470,7 +11826,7 @@
               </a:spcAft>
             </a:pPr>
             <a:r>
-              <a:rPr sz="1600" b="0">
+              <a:rPr sz="1300" b="0">
                 <a:solidFill>
                   <a:srgbClr val="1C2E45"/>
                 </a:solidFill>
@@ -11485,14 +11841,14 @@
       </p:sp>
       <p:sp>
         <p:nvSpPr>
-          <p:cNvPr id="12" name="Rounded Rectangle 11"/>
+          <p:cNvPr id="14" name="Rounded Rectangle 13"/>
           <p:cNvSpPr/>
           <p:nvPr/>
         </p:nvSpPr>
         <p:spPr>
           <a:xfrm>
-            <a:off x="7223760" y="1280160"/>
-            <a:ext cx="2194560" cy="1143000"/>
+            <a:off x="8275320" y="1234440"/>
+            <a:ext cx="1783080" cy="1170432"/>
           </a:xfrm>
           <a:prstGeom prst="roundRect">
             <a:avLst>
@@ -11533,14 +11889,14 @@
       </p:sp>
       <p:sp>
         <p:nvSpPr>
-          <p:cNvPr id="13" name="TextBox 12"/>
-          <p:cNvSpPr txBox="1"/>
-          <p:nvPr/>
-        </p:nvSpPr>
-        <p:spPr>
-          <a:xfrm>
-            <a:off x="7315200" y="1417320"/>
-            <a:ext cx="2011680" cy="320040"/>
+          <p:cNvPr id="15" name="TextBox 14"/>
+          <p:cNvSpPr txBox="1"/>
+          <p:nvPr/>
+        </p:nvSpPr>
+        <p:spPr>
+          <a:xfrm>
+            <a:off x="8330184" y="1362456"/>
+            <a:ext cx="1673352" cy="320040"/>
           </a:xfrm>
           <a:prstGeom prst="rect">
             <a:avLst/>
@@ -11553,7 +11909,7 @@
           <a:p>
             <a:pPr algn="ctr"/>
             <a:r>
-              <a:rPr sz="1100" b="0">
+              <a:rPr sz="1000" b="0">
                 <a:solidFill>
                   <a:srgbClr val="5A6E84"/>
                 </a:solidFill>
@@ -11568,14 +11924,14 @@
       </p:sp>
       <p:sp>
         <p:nvSpPr>
-          <p:cNvPr id="14" name="TextBox 13"/>
-          <p:cNvSpPr txBox="1"/>
-          <p:nvPr/>
-        </p:nvSpPr>
-        <p:spPr>
-          <a:xfrm>
-            <a:off x="7296912" y="1737360"/>
-            <a:ext cx="2048256" cy="548640"/>
+          <p:cNvPr id="16" name="TextBox 15"/>
+          <p:cNvSpPr txBox="1"/>
+          <p:nvPr/>
+        </p:nvSpPr>
+        <p:spPr>
+          <a:xfrm>
+            <a:off x="8330184" y="1691640"/>
+            <a:ext cx="1673352" cy="594360"/>
           </a:xfrm>
           <a:prstGeom prst="rect">
             <a:avLst/>
@@ -11588,7 +11944,7 @@
           <a:p>
             <a:pPr algn="ctr"/>
             <a:r>
-              <a:rPr sz="1300" b="1">
+              <a:rPr sz="1200" b="1">
                 <a:solidFill>
                   <a:srgbClr val="0B3A6A"/>
                 </a:solidFill>
@@ -11603,14 +11959,14 @@
       </p:sp>
       <p:sp>
         <p:nvSpPr>
-          <p:cNvPr id="15" name="Rounded Rectangle 14"/>
+          <p:cNvPr id="17" name="Rounded Rectangle 16"/>
           <p:cNvSpPr/>
           <p:nvPr/>
         </p:nvSpPr>
         <p:spPr>
           <a:xfrm>
-            <a:off x="9555480" y="1280160"/>
-            <a:ext cx="2194560" cy="1143000"/>
+            <a:off x="10149839" y="1234440"/>
+            <a:ext cx="1783080" cy="1170432"/>
           </a:xfrm>
           <a:prstGeom prst="roundRect">
             <a:avLst>
@@ -11651,14 +12007,14 @@
       </p:sp>
       <p:sp>
         <p:nvSpPr>
-          <p:cNvPr id="16" name="TextBox 15"/>
-          <p:cNvSpPr txBox="1"/>
-          <p:nvPr/>
-        </p:nvSpPr>
-        <p:spPr>
-          <a:xfrm>
-            <a:off x="9646920" y="1417320"/>
-            <a:ext cx="2011680" cy="320040"/>
+          <p:cNvPr id="18" name="TextBox 17"/>
+          <p:cNvSpPr txBox="1"/>
+          <p:nvPr/>
+        </p:nvSpPr>
+        <p:spPr>
+          <a:xfrm>
+            <a:off x="10204703" y="1362456"/>
+            <a:ext cx="1673352" cy="320040"/>
           </a:xfrm>
           <a:prstGeom prst="rect">
             <a:avLst/>
@@ -11671,7 +12027,7 @@
           <a:p>
             <a:pPr algn="ctr"/>
             <a:r>
-              <a:rPr sz="1100" b="0">
+              <a:rPr sz="1000" b="0">
                 <a:solidFill>
                   <a:srgbClr val="5A6E84"/>
                 </a:solidFill>
@@ -11686,14 +12042,14 @@
       </p:sp>
       <p:sp>
         <p:nvSpPr>
-          <p:cNvPr id="17" name="TextBox 16"/>
-          <p:cNvSpPr txBox="1"/>
-          <p:nvPr/>
-        </p:nvSpPr>
-        <p:spPr>
-          <a:xfrm>
-            <a:off x="9628632" y="1737360"/>
-            <a:ext cx="2048256" cy="548640"/>
+          <p:cNvPr id="19" name="TextBox 18"/>
+          <p:cNvSpPr txBox="1"/>
+          <p:nvPr/>
+        </p:nvSpPr>
+        <p:spPr>
+          <a:xfrm>
+            <a:off x="10204703" y="1691640"/>
+            <a:ext cx="1673352" cy="594360"/>
           </a:xfrm>
           <a:prstGeom prst="rect">
             <a:avLst/>
@@ -11706,7 +12062,7 @@
           <a:p>
             <a:pPr algn="ctr"/>
             <a:r>
-              <a:rPr sz="1300" b="1">
+              <a:rPr sz="1200" b="1">
                 <a:solidFill>
                   <a:srgbClr val="0B3A6A"/>
                 </a:solidFill>
@@ -11721,14 +12077,14 @@
       </p:sp>
       <p:sp>
         <p:nvSpPr>
-          <p:cNvPr id="18" name="Rounded Rectangle 17"/>
+          <p:cNvPr id="20" name="Rounded Rectangle 19"/>
           <p:cNvSpPr/>
           <p:nvPr/>
         </p:nvSpPr>
         <p:spPr>
           <a:xfrm>
-            <a:off x="7223760" y="2542032"/>
-            <a:ext cx="2194560" cy="1143000"/>
+            <a:off x="8275320" y="2514600"/>
+            <a:ext cx="1783080" cy="1170432"/>
           </a:xfrm>
           <a:prstGeom prst="roundRect">
             <a:avLst>
@@ -11769,14 +12125,14 @@
       </p:sp>
       <p:sp>
         <p:nvSpPr>
-          <p:cNvPr id="19" name="TextBox 18"/>
-          <p:cNvSpPr txBox="1"/>
-          <p:nvPr/>
-        </p:nvSpPr>
-        <p:spPr>
-          <a:xfrm>
-            <a:off x="7315200" y="2679192"/>
-            <a:ext cx="2011680" cy="320040"/>
+          <p:cNvPr id="21" name="TextBox 20"/>
+          <p:cNvSpPr txBox="1"/>
+          <p:nvPr/>
+        </p:nvSpPr>
+        <p:spPr>
+          <a:xfrm>
+            <a:off x="8330184" y="2642616"/>
+            <a:ext cx="1673352" cy="320040"/>
           </a:xfrm>
           <a:prstGeom prst="rect">
             <a:avLst/>
@@ -11789,7 +12145,7 @@
           <a:p>
             <a:pPr algn="ctr"/>
             <a:r>
-              <a:rPr sz="1100" b="0">
+              <a:rPr sz="1000" b="0">
                 <a:solidFill>
                   <a:srgbClr val="5A6E84"/>
                 </a:solidFill>
@@ -11804,14 +12160,14 @@
       </p:sp>
       <p:sp>
         <p:nvSpPr>
-          <p:cNvPr id="20" name="TextBox 19"/>
-          <p:cNvSpPr txBox="1"/>
-          <p:nvPr/>
-        </p:nvSpPr>
-        <p:spPr>
-          <a:xfrm>
-            <a:off x="7296912" y="2999232"/>
-            <a:ext cx="2048256" cy="548640"/>
+          <p:cNvPr id="22" name="TextBox 21"/>
+          <p:cNvSpPr txBox="1"/>
+          <p:nvPr/>
+        </p:nvSpPr>
+        <p:spPr>
+          <a:xfrm>
+            <a:off x="8330184" y="2971800"/>
+            <a:ext cx="1673352" cy="594360"/>
           </a:xfrm>
           <a:prstGeom prst="rect">
             <a:avLst/>
@@ -11824,7 +12180,7 @@
           <a:p>
             <a:pPr algn="ctr"/>
             <a:r>
-              <a:rPr sz="1300" b="1">
+              <a:rPr sz="1200" b="1">
                 <a:solidFill>
                   <a:srgbClr val="0B3A6A"/>
                 </a:solidFill>
@@ -11839,14 +12195,14 @@
       </p:sp>
       <p:sp>
         <p:nvSpPr>
-          <p:cNvPr id="21" name="Rounded Rectangle 20"/>
+          <p:cNvPr id="23" name="Rounded Rectangle 22"/>
           <p:cNvSpPr/>
           <p:nvPr/>
         </p:nvSpPr>
         <p:spPr>
           <a:xfrm>
-            <a:off x="9555480" y="2542032"/>
-            <a:ext cx="2194560" cy="1143000"/>
+            <a:off x="10149839" y="2514600"/>
+            <a:ext cx="1783080" cy="1170432"/>
           </a:xfrm>
           <a:prstGeom prst="roundRect">
             <a:avLst>
@@ -11887,14 +12243,14 @@
       </p:sp>
       <p:sp>
         <p:nvSpPr>
-          <p:cNvPr id="22" name="TextBox 21"/>
-          <p:cNvSpPr txBox="1"/>
-          <p:nvPr/>
-        </p:nvSpPr>
-        <p:spPr>
-          <a:xfrm>
-            <a:off x="9646920" y="2679192"/>
-            <a:ext cx="2011680" cy="320040"/>
+          <p:cNvPr id="24" name="TextBox 23"/>
+          <p:cNvSpPr txBox="1"/>
+          <p:nvPr/>
+        </p:nvSpPr>
+        <p:spPr>
+          <a:xfrm>
+            <a:off x="10204703" y="2642616"/>
+            <a:ext cx="1673352" cy="320040"/>
           </a:xfrm>
           <a:prstGeom prst="rect">
             <a:avLst/>
@@ -11907,7 +12263,7 @@
           <a:p>
             <a:pPr algn="ctr"/>
             <a:r>
-              <a:rPr sz="1100" b="0">
+              <a:rPr sz="1000" b="0">
                 <a:solidFill>
                   <a:srgbClr val="5A6E84"/>
                 </a:solidFill>
@@ -11922,14 +12278,14 @@
       </p:sp>
       <p:sp>
         <p:nvSpPr>
-          <p:cNvPr id="23" name="TextBox 22"/>
-          <p:cNvSpPr txBox="1"/>
-          <p:nvPr/>
-        </p:nvSpPr>
-        <p:spPr>
-          <a:xfrm>
-            <a:off x="9628632" y="2999232"/>
-            <a:ext cx="2048256" cy="548640"/>
+          <p:cNvPr id="25" name="TextBox 24"/>
+          <p:cNvSpPr txBox="1"/>
+          <p:nvPr/>
+        </p:nvSpPr>
+        <p:spPr>
+          <a:xfrm>
+            <a:off x="10204703" y="2971800"/>
+            <a:ext cx="1673352" cy="594360"/>
           </a:xfrm>
           <a:prstGeom prst="rect">
             <a:avLst/>
@@ -11942,7 +12298,7 @@
           <a:p>
             <a:pPr algn="ctr"/>
             <a:r>
-              <a:rPr sz="1300" b="1">
+              <a:rPr sz="1200" b="1">
                 <a:solidFill>
                   <a:srgbClr val="0B3A6A"/>
                 </a:solidFill>
@@ -11957,14 +12313,14 @@
       </p:sp>
       <p:sp>
         <p:nvSpPr>
-          <p:cNvPr id="24" name="Rounded Rectangle 23"/>
+          <p:cNvPr id="26" name="Rounded Rectangle 25"/>
           <p:cNvSpPr/>
           <p:nvPr/>
         </p:nvSpPr>
         <p:spPr>
           <a:xfrm>
-            <a:off x="7223760" y="3803904"/>
-            <a:ext cx="2194560" cy="1143000"/>
+            <a:off x="8275320" y="3794760"/>
+            <a:ext cx="1783080" cy="1170432"/>
           </a:xfrm>
           <a:prstGeom prst="roundRect">
             <a:avLst>
@@ -12005,14 +12361,14 @@
       </p:sp>
       <p:sp>
         <p:nvSpPr>
-          <p:cNvPr id="25" name="TextBox 24"/>
-          <p:cNvSpPr txBox="1"/>
-          <p:nvPr/>
-        </p:nvSpPr>
-        <p:spPr>
-          <a:xfrm>
-            <a:off x="7315200" y="3941064"/>
-            <a:ext cx="2011680" cy="320040"/>
+          <p:cNvPr id="27" name="TextBox 26"/>
+          <p:cNvSpPr txBox="1"/>
+          <p:nvPr/>
+        </p:nvSpPr>
+        <p:spPr>
+          <a:xfrm>
+            <a:off x="8330184" y="3922776"/>
+            <a:ext cx="1673352" cy="320040"/>
           </a:xfrm>
           <a:prstGeom prst="rect">
             <a:avLst/>
@@ -12025,7 +12381,7 @@
           <a:p>
             <a:pPr algn="ctr"/>
             <a:r>
-              <a:rPr sz="1100" b="0">
+              <a:rPr sz="1000" b="0">
                 <a:solidFill>
                   <a:srgbClr val="5A6E84"/>
                 </a:solidFill>
@@ -12040,14 +12396,14 @@
       </p:sp>
       <p:sp>
         <p:nvSpPr>
-          <p:cNvPr id="26" name="TextBox 25"/>
-          <p:cNvSpPr txBox="1"/>
-          <p:nvPr/>
-        </p:nvSpPr>
-        <p:spPr>
-          <a:xfrm>
-            <a:off x="7296912" y="4261104"/>
-            <a:ext cx="2048256" cy="548640"/>
+          <p:cNvPr id="28" name="TextBox 27"/>
+          <p:cNvSpPr txBox="1"/>
+          <p:nvPr/>
+        </p:nvSpPr>
+        <p:spPr>
+          <a:xfrm>
+            <a:off x="8330184" y="4251960"/>
+            <a:ext cx="1673352" cy="594360"/>
           </a:xfrm>
           <a:prstGeom prst="rect">
             <a:avLst/>
@@ -12060,7 +12416,7 @@
           <a:p>
             <a:pPr algn="ctr"/>
             <a:r>
-              <a:rPr sz="1300" b="1">
+              <a:rPr sz="1200" b="1">
                 <a:solidFill>
                   <a:srgbClr val="0B3A6A"/>
                 </a:solidFill>
@@ -12075,14 +12431,14 @@
       </p:sp>
       <p:sp>
         <p:nvSpPr>
-          <p:cNvPr id="27" name="Rounded Rectangle 26"/>
+          <p:cNvPr id="29" name="Rounded Rectangle 28"/>
           <p:cNvSpPr/>
           <p:nvPr/>
         </p:nvSpPr>
         <p:spPr>
           <a:xfrm>
-            <a:off x="9555480" y="3803904"/>
-            <a:ext cx="2194560" cy="1143000"/>
+            <a:off x="10149839" y="3794760"/>
+            <a:ext cx="1783080" cy="1170432"/>
           </a:xfrm>
           <a:prstGeom prst="roundRect">
             <a:avLst>
@@ -12123,14 +12479,14 @@
       </p:sp>
       <p:sp>
         <p:nvSpPr>
-          <p:cNvPr id="28" name="TextBox 27"/>
-          <p:cNvSpPr txBox="1"/>
-          <p:nvPr/>
-        </p:nvSpPr>
-        <p:spPr>
-          <a:xfrm>
-            <a:off x="9646920" y="3941064"/>
-            <a:ext cx="2011680" cy="320040"/>
+          <p:cNvPr id="30" name="TextBox 29"/>
+          <p:cNvSpPr txBox="1"/>
+          <p:nvPr/>
+        </p:nvSpPr>
+        <p:spPr>
+          <a:xfrm>
+            <a:off x="10204703" y="3922776"/>
+            <a:ext cx="1673352" cy="320040"/>
           </a:xfrm>
           <a:prstGeom prst="rect">
             <a:avLst/>
@@ -12143,7 +12499,7 @@
           <a:p>
             <a:pPr algn="ctr"/>
             <a:r>
-              <a:rPr sz="1100" b="0">
+              <a:rPr sz="1000" b="0">
                 <a:solidFill>
                   <a:srgbClr val="5A6E84"/>
                 </a:solidFill>
@@ -12158,14 +12514,14 @@
       </p:sp>
       <p:sp>
         <p:nvSpPr>
-          <p:cNvPr id="29" name="TextBox 28"/>
-          <p:cNvSpPr txBox="1"/>
-          <p:nvPr/>
-        </p:nvSpPr>
-        <p:spPr>
-          <a:xfrm>
-            <a:off x="9628632" y="4261104"/>
-            <a:ext cx="2048256" cy="548640"/>
+          <p:cNvPr id="31" name="TextBox 30"/>
+          <p:cNvSpPr txBox="1"/>
+          <p:nvPr/>
+        </p:nvSpPr>
+        <p:spPr>
+          <a:xfrm>
+            <a:off x="10204703" y="4251960"/>
+            <a:ext cx="1673352" cy="594360"/>
           </a:xfrm>
           <a:prstGeom prst="rect">
             <a:avLst/>
@@ -12178,7 +12534,7 @@
           <a:p>
             <a:pPr algn="ctr"/>
             <a:r>
-              <a:rPr sz="1300" b="1">
+              <a:rPr sz="1200" b="1">
                 <a:solidFill>
                   <a:srgbClr val="0B3A6A"/>
                 </a:solidFill>
@@ -12193,14 +12549,14 @@
       </p:sp>
       <p:sp>
         <p:nvSpPr>
-          <p:cNvPr id="30" name="Rounded Rectangle 29"/>
+          <p:cNvPr id="32" name="Rounded Rectangle 31"/>
           <p:cNvSpPr/>
           <p:nvPr/>
         </p:nvSpPr>
         <p:spPr>
           <a:xfrm>
-            <a:off x="7223760" y="5065776"/>
-            <a:ext cx="2194560" cy="1143000"/>
+            <a:off x="8275320" y="5074920"/>
+            <a:ext cx="1783080" cy="1170432"/>
           </a:xfrm>
           <a:prstGeom prst="roundRect">
             <a:avLst>
@@ -12241,14 +12597,14 @@
       </p:sp>
       <p:sp>
         <p:nvSpPr>
-          <p:cNvPr id="31" name="TextBox 30"/>
-          <p:cNvSpPr txBox="1"/>
-          <p:nvPr/>
-        </p:nvSpPr>
-        <p:spPr>
-          <a:xfrm>
-            <a:off x="7315200" y="5202936"/>
-            <a:ext cx="2011680" cy="320040"/>
+          <p:cNvPr id="33" name="TextBox 32"/>
+          <p:cNvSpPr txBox="1"/>
+          <p:nvPr/>
+        </p:nvSpPr>
+        <p:spPr>
+          <a:xfrm>
+            <a:off x="8330184" y="5202936"/>
+            <a:ext cx="1673352" cy="320040"/>
           </a:xfrm>
           <a:prstGeom prst="rect">
             <a:avLst/>
@@ -12261,7 +12617,7 @@
           <a:p>
             <a:pPr algn="ctr"/>
             <a:r>
-              <a:rPr sz="1100" b="0">
+              <a:rPr sz="1000" b="0">
                 <a:solidFill>
                   <a:srgbClr val="5A6E84"/>
                 </a:solidFill>
@@ -12276,14 +12632,14 @@
       </p:sp>
       <p:sp>
         <p:nvSpPr>
-          <p:cNvPr id="32" name="TextBox 31"/>
-          <p:cNvSpPr txBox="1"/>
-          <p:nvPr/>
-        </p:nvSpPr>
-        <p:spPr>
-          <a:xfrm>
-            <a:off x="7296912" y="5522976"/>
-            <a:ext cx="2048256" cy="548640"/>
+          <p:cNvPr id="34" name="TextBox 33"/>
+          <p:cNvSpPr txBox="1"/>
+          <p:nvPr/>
+        </p:nvSpPr>
+        <p:spPr>
+          <a:xfrm>
+            <a:off x="8330184" y="5532120"/>
+            <a:ext cx="1673352" cy="594360"/>
           </a:xfrm>
           <a:prstGeom prst="rect">
             <a:avLst/>
@@ -12296,7 +12652,7 @@
           <a:p>
             <a:pPr algn="ctr"/>
             <a:r>
-              <a:rPr sz="1300" b="1">
+              <a:rPr sz="1200" b="1">
                 <a:solidFill>
                   <a:srgbClr val="0B3A6A"/>
                 </a:solidFill>
@@ -12311,14 +12667,14 @@
       </p:sp>
       <p:sp>
         <p:nvSpPr>
-          <p:cNvPr id="33" name="Rounded Rectangle 32"/>
+          <p:cNvPr id="35" name="Rounded Rectangle 34"/>
           <p:cNvSpPr/>
           <p:nvPr/>
         </p:nvSpPr>
         <p:spPr>
           <a:xfrm>
-            <a:off x="9555480" y="5065776"/>
-            <a:ext cx="2194560" cy="1143000"/>
+            <a:off x="10149839" y="5074920"/>
+            <a:ext cx="1783080" cy="1170432"/>
           </a:xfrm>
           <a:prstGeom prst="roundRect">
             <a:avLst>
@@ -12359,14 +12715,14 @@
       </p:sp>
       <p:sp>
         <p:nvSpPr>
-          <p:cNvPr id="34" name="TextBox 33"/>
-          <p:cNvSpPr txBox="1"/>
-          <p:nvPr/>
-        </p:nvSpPr>
-        <p:spPr>
-          <a:xfrm>
-            <a:off x="9646920" y="5202936"/>
-            <a:ext cx="2011680" cy="320040"/>
+          <p:cNvPr id="36" name="TextBox 35"/>
+          <p:cNvSpPr txBox="1"/>
+          <p:nvPr/>
+        </p:nvSpPr>
+        <p:spPr>
+          <a:xfrm>
+            <a:off x="10204703" y="5202936"/>
+            <a:ext cx="1673352" cy="320040"/>
           </a:xfrm>
           <a:prstGeom prst="rect">
             <a:avLst/>
@@ -12379,7 +12735,7 @@
           <a:p>
             <a:pPr algn="ctr"/>
             <a:r>
-              <a:rPr sz="1100" b="0">
+              <a:rPr sz="1000" b="0">
                 <a:solidFill>
                   <a:srgbClr val="5A6E84"/>
                 </a:solidFill>
@@ -12394,14 +12750,14 @@
       </p:sp>
       <p:sp>
         <p:nvSpPr>
-          <p:cNvPr id="35" name="TextBox 34"/>
-          <p:cNvSpPr txBox="1"/>
-          <p:nvPr/>
-        </p:nvSpPr>
-        <p:spPr>
-          <a:xfrm>
-            <a:off x="9628632" y="5522976"/>
-            <a:ext cx="2048256" cy="548640"/>
+          <p:cNvPr id="37" name="TextBox 36"/>
+          <p:cNvSpPr txBox="1"/>
+          <p:nvPr/>
+        </p:nvSpPr>
+        <p:spPr>
+          <a:xfrm>
+            <a:off x="10204703" y="5532120"/>
+            <a:ext cx="1673352" cy="594360"/>
           </a:xfrm>
           <a:prstGeom prst="rect">
             <a:avLst/>
@@ -12414,7 +12770,7 @@
           <a:p>
             <a:pPr algn="ctr"/>
             <a:r>
-              <a:rPr sz="1300" b="1">
+              <a:rPr sz="1200" b="1">
                 <a:solidFill>
                   <a:srgbClr val="0B3A6A"/>
                 </a:solidFill>
@@ -12725,8 +13081,8 @@
         </p:nvSpPr>
         <p:spPr>
           <a:xfrm>
-            <a:off x="365760" y="1325880"/>
-            <a:ext cx="5623560" cy="4937760"/>
+            <a:off x="365760" y="1280160"/>
+            <a:ext cx="5623560" cy="5074920"/>
           </a:xfrm>
           <a:prstGeom prst="roundRect">
             <a:avLst>
@@ -12765,16 +13121,40 @@
           </a:p>
         </p:txBody>
       </p:sp>
-      <p:sp>
-        <p:nvSpPr>
-          <p:cNvPr id="10" name="TextBox 9"/>
-          <p:cNvSpPr txBox="1"/>
-          <p:nvPr/>
-        </p:nvSpPr>
-        <p:spPr>
-          <a:xfrm>
-            <a:off x="530352" y="1453896"/>
-            <a:ext cx="5294376" cy="365760"/>
+      <p:pic>
+        <p:nvPicPr>
+          <p:cNvPr id="10" name="Picture 9" descr="pudu2.png"/>
+          <p:cNvPicPr>
+            <a:picLocks noChangeAspect="1"/>
+          </p:cNvPicPr>
+          <p:nvPr/>
+        </p:nvPicPr>
+        <p:blipFill>
+          <a:blip r:embed="rId2"/>
+          <a:stretch>
+            <a:fillRect/>
+          </a:stretch>
+        </p:blipFill>
+        <p:spPr>
+          <a:xfrm>
+            <a:off x="594360" y="1417320"/>
+            <a:ext cx="1791793" cy="2331720"/>
+          </a:xfrm>
+          <a:prstGeom prst="rect">
+            <a:avLst/>
+          </a:prstGeom>
+        </p:spPr>
+      </p:pic>
+      <p:sp>
+        <p:nvSpPr>
+          <p:cNvPr id="11" name="TextBox 10"/>
+          <p:cNvSpPr txBox="1"/>
+          <p:nvPr/>
+        </p:nvSpPr>
+        <p:spPr>
+          <a:xfrm>
+            <a:off x="2560320" y="1554480"/>
+            <a:ext cx="3200400" cy="2011680"/>
           </a:xfrm>
           <a:prstGeom prst="rect">
             <a:avLst/>
@@ -12802,14 +13182,14 @@
       </p:sp>
       <p:sp>
         <p:nvSpPr>
-          <p:cNvPr id="11" name="TextBox 10"/>
-          <p:cNvSpPr txBox="1"/>
-          <p:nvPr/>
-        </p:nvSpPr>
-        <p:spPr>
-          <a:xfrm>
-            <a:off x="530352" y="1801368"/>
-            <a:ext cx="5294376" cy="4352544"/>
+          <p:cNvPr id="12" name="TextBox 11"/>
+          <p:cNvSpPr txBox="1"/>
+          <p:nvPr/>
+        </p:nvSpPr>
+        <p:spPr>
+          <a:xfrm>
+            <a:off x="594360" y="3840480"/>
+            <a:ext cx="5166360" cy="2286000"/>
           </a:xfrm>
           <a:prstGeom prst="rect">
             <a:avLst/>
@@ -12822,9 +13202,8 @@
           </a:bodyPr>
           <a:lstStyle/>
           <a:p>
-            <a:pPr algn="l"/>
-            <a:r>
-              <a:rPr sz="1600" b="0">
+            <a:r>
+              <a:rPr sz="1500" b="0">
                 <a:solidFill>
                   <a:srgbClr val="1C2E45"/>
                 </a:solidFill>
@@ -12839,14 +13218,14 @@
       </p:sp>
       <p:sp>
         <p:nvSpPr>
-          <p:cNvPr id="12" name="Rounded Rectangle 11"/>
+          <p:cNvPr id="13" name="Rounded Rectangle 12"/>
           <p:cNvSpPr/>
           <p:nvPr/>
         </p:nvSpPr>
         <p:spPr>
           <a:xfrm>
-            <a:off x="6172200" y="1325880"/>
-            <a:ext cx="5623560" cy="4937760"/>
+            <a:off x="6172200" y="1280160"/>
+            <a:ext cx="5623560" cy="5074920"/>
           </a:xfrm>
           <a:prstGeom prst="roundRect">
             <a:avLst>
@@ -12885,16 +13264,40 @@
           </a:p>
         </p:txBody>
       </p:sp>
-      <p:sp>
-        <p:nvSpPr>
-          <p:cNvPr id="13" name="TextBox 12"/>
-          <p:cNvSpPr txBox="1"/>
-          <p:nvPr/>
-        </p:nvSpPr>
-        <p:spPr>
-          <a:xfrm>
-            <a:off x="6336792" y="1453896"/>
-            <a:ext cx="5294376" cy="365760"/>
+      <p:pic>
+        <p:nvPicPr>
+          <p:cNvPr id="14" name="Picture 13" descr="ketty.png"/>
+          <p:cNvPicPr>
+            <a:picLocks noChangeAspect="1"/>
+          </p:cNvPicPr>
+          <p:nvPr/>
+        </p:nvPicPr>
+        <p:blipFill>
+          <a:blip r:embed="rId3"/>
+          <a:stretch>
+            <a:fillRect/>
+          </a:stretch>
+        </p:blipFill>
+        <p:spPr>
+          <a:xfrm>
+            <a:off x="6400800" y="1417320"/>
+            <a:ext cx="1776925" cy="2331720"/>
+          </a:xfrm>
+          <a:prstGeom prst="rect">
+            <a:avLst/>
+          </a:prstGeom>
+        </p:spPr>
+      </p:pic>
+      <p:sp>
+        <p:nvSpPr>
+          <p:cNvPr id="15" name="TextBox 14"/>
+          <p:cNvSpPr txBox="1"/>
+          <p:nvPr/>
+        </p:nvSpPr>
+        <p:spPr>
+          <a:xfrm>
+            <a:off x="8366760" y="1554480"/>
+            <a:ext cx="3200400" cy="2011680"/>
           </a:xfrm>
           <a:prstGeom prst="rect">
             <a:avLst/>
@@ -12922,14 +13325,14 @@
       </p:sp>
       <p:sp>
         <p:nvSpPr>
-          <p:cNvPr id="14" name="TextBox 13"/>
-          <p:cNvSpPr txBox="1"/>
-          <p:nvPr/>
-        </p:nvSpPr>
-        <p:spPr>
-          <a:xfrm>
-            <a:off x="6336792" y="1801368"/>
-            <a:ext cx="5294376" cy="4352544"/>
+          <p:cNvPr id="16" name="TextBox 15"/>
+          <p:cNvSpPr txBox="1"/>
+          <p:nvPr/>
+        </p:nvSpPr>
+        <p:spPr>
+          <a:xfrm>
+            <a:off x="6400800" y="3840480"/>
+            <a:ext cx="5166360" cy="2286000"/>
           </a:xfrm>
           <a:prstGeom prst="rect">
             <a:avLst/>
@@ -12942,9 +13345,8 @@
           </a:bodyPr>
           <a:lstStyle/>
           <a:p>
-            <a:pPr algn="l"/>
-            <a:r>
-              <a:rPr sz="1600" b="0">
+            <a:r>
+              <a:rPr sz="1500" b="0">
                 <a:solidFill>
                   <a:srgbClr val="1C2E45"/>
                 </a:solidFill>
@@ -13255,8 +13657,8 @@
         </p:nvSpPr>
         <p:spPr>
           <a:xfrm>
-            <a:off x="365760" y="1325880"/>
-            <a:ext cx="5623560" cy="4937760"/>
+            <a:off x="365760" y="1280160"/>
+            <a:ext cx="5623560" cy="5074920"/>
           </a:xfrm>
           <a:prstGeom prst="roundRect">
             <a:avLst>
@@ -13295,16 +13697,40 @@
           </a:p>
         </p:txBody>
       </p:sp>
-      <p:sp>
-        <p:nvSpPr>
-          <p:cNvPr id="10" name="TextBox 9"/>
-          <p:cNvSpPr txBox="1"/>
-          <p:nvPr/>
-        </p:nvSpPr>
-        <p:spPr>
-          <a:xfrm>
-            <a:off x="530352" y="1453896"/>
-            <a:ext cx="5294376" cy="365760"/>
+      <p:pic>
+        <p:nvPicPr>
+          <p:cNvPr id="10" name="Picture 9" descr="hola.png"/>
+          <p:cNvPicPr>
+            <a:picLocks noChangeAspect="1"/>
+          </p:cNvPicPr>
+          <p:nvPr/>
+        </p:nvPicPr>
+        <p:blipFill>
+          <a:blip r:embed="rId2"/>
+          <a:stretch>
+            <a:fillRect/>
+          </a:stretch>
+        </p:blipFill>
+        <p:spPr>
+          <a:xfrm>
+            <a:off x="594360" y="1417320"/>
+            <a:ext cx="1507984" cy="2331720"/>
+          </a:xfrm>
+          <a:prstGeom prst="rect">
+            <a:avLst/>
+          </a:prstGeom>
+        </p:spPr>
+      </p:pic>
+      <p:sp>
+        <p:nvSpPr>
+          <p:cNvPr id="11" name="TextBox 10"/>
+          <p:cNvSpPr txBox="1"/>
+          <p:nvPr/>
+        </p:nvSpPr>
+        <p:spPr>
+          <a:xfrm>
+            <a:off x="2560320" y="1554480"/>
+            <a:ext cx="3200400" cy="2011680"/>
           </a:xfrm>
           <a:prstGeom prst="rect">
             <a:avLst/>
@@ -13332,14 +13758,14 @@
       </p:sp>
       <p:sp>
         <p:nvSpPr>
-          <p:cNvPr id="11" name="TextBox 10"/>
-          <p:cNvSpPr txBox="1"/>
-          <p:nvPr/>
-        </p:nvSpPr>
-        <p:spPr>
-          <a:xfrm>
-            <a:off x="530352" y="1801368"/>
-            <a:ext cx="5294376" cy="4352544"/>
+          <p:cNvPr id="12" name="TextBox 11"/>
+          <p:cNvSpPr txBox="1"/>
+          <p:nvPr/>
+        </p:nvSpPr>
+        <p:spPr>
+          <a:xfrm>
+            <a:off x="594360" y="3840480"/>
+            <a:ext cx="5166360" cy="2286000"/>
           </a:xfrm>
           <a:prstGeom prst="rect">
             <a:avLst/>
@@ -13352,9 +13778,8 @@
           </a:bodyPr>
           <a:lstStyle/>
           <a:p>
-            <a:pPr algn="l"/>
-            <a:r>
-              <a:rPr sz="1600" b="0">
+            <a:r>
+              <a:rPr sz="1500" b="0">
                 <a:solidFill>
                   <a:srgbClr val="1C2E45"/>
                 </a:solidFill>
@@ -13369,14 +13794,14 @@
       </p:sp>
       <p:sp>
         <p:nvSpPr>
-          <p:cNvPr id="12" name="Rounded Rectangle 11"/>
+          <p:cNvPr id="13" name="Rounded Rectangle 12"/>
           <p:cNvSpPr/>
           <p:nvPr/>
         </p:nvSpPr>
         <p:spPr>
           <a:xfrm>
-            <a:off x="6172200" y="1325880"/>
-            <a:ext cx="5623560" cy="4937760"/>
+            <a:off x="6172200" y="1280160"/>
+            <a:ext cx="5623560" cy="5074920"/>
           </a:xfrm>
           <a:prstGeom prst="roundRect">
             <a:avLst>
@@ -13415,16 +13840,40 @@
           </a:p>
         </p:txBody>
       </p:sp>
-      <p:sp>
-        <p:nvSpPr>
-          <p:cNvPr id="13" name="TextBox 12"/>
-          <p:cNvSpPr txBox="1"/>
-          <p:nvPr/>
-        </p:nvSpPr>
-        <p:spPr>
-          <a:xfrm>
-            <a:off x="6336792" y="1453896"/>
-            <a:ext cx="5294376" cy="365760"/>
+      <p:pic>
+        <p:nvPicPr>
+          <p:cNvPr id="14" name="Picture 13" descr="cc1.png"/>
+          <p:cNvPicPr>
+            <a:picLocks noChangeAspect="1"/>
+          </p:cNvPicPr>
+          <p:nvPr/>
+        </p:nvPicPr>
+        <p:blipFill>
+          <a:blip r:embed="rId3"/>
+          <a:stretch>
+            <a:fillRect/>
+          </a:stretch>
+        </p:blipFill>
+        <p:spPr>
+          <a:xfrm>
+            <a:off x="6400800" y="1417320"/>
+            <a:ext cx="1310937" cy="2331720"/>
+          </a:xfrm>
+          <a:prstGeom prst="rect">
+            <a:avLst/>
+          </a:prstGeom>
+        </p:spPr>
+      </p:pic>
+      <p:sp>
+        <p:nvSpPr>
+          <p:cNvPr id="15" name="TextBox 14"/>
+          <p:cNvSpPr txBox="1"/>
+          <p:nvPr/>
+        </p:nvSpPr>
+        <p:spPr>
+          <a:xfrm>
+            <a:off x="8366760" y="1554480"/>
+            <a:ext cx="3200400" cy="2011680"/>
           </a:xfrm>
           <a:prstGeom prst="rect">
             <a:avLst/>
@@ -13452,14 +13901,14 @@
       </p:sp>
       <p:sp>
         <p:nvSpPr>
-          <p:cNvPr id="14" name="TextBox 13"/>
-          <p:cNvSpPr txBox="1"/>
-          <p:nvPr/>
-        </p:nvSpPr>
-        <p:spPr>
-          <a:xfrm>
-            <a:off x="6336792" y="1801368"/>
-            <a:ext cx="5294376" cy="4352544"/>
+          <p:cNvPr id="16" name="TextBox 15"/>
+          <p:cNvSpPr txBox="1"/>
+          <p:nvPr/>
+        </p:nvSpPr>
+        <p:spPr>
+          <a:xfrm>
+            <a:off x="6400800" y="3840480"/>
+            <a:ext cx="5166360" cy="2286000"/>
           </a:xfrm>
           <a:prstGeom prst="rect">
             <a:avLst/>
@@ -13472,9 +13921,8 @@
           </a:bodyPr>
           <a:lstStyle/>
           <a:p>
-            <a:pPr algn="l"/>
-            <a:r>
-              <a:rPr sz="1600" b="0">
+            <a:r>
+              <a:rPr sz="1500" b="0">
                 <a:solidFill>
                   <a:srgbClr val="1C2E45"/>
                 </a:solidFill>
